--- a/PPT정리/1.Claude 개발 환경설정.pptx
+++ b/PPT정리/1.Claude 개발 환경설정.pptx
@@ -4844,7 +4844,7 @@
         <p:spPr>
           <a:xfrm>
             <a:off x="5737860" y="2149039"/>
-            <a:ext cx="6096000" cy="276999"/>
+            <a:ext cx="6096000" cy="1569660"/>
           </a:xfrm>
           <a:prstGeom prst="rect">
             <a:avLst/>
@@ -4877,9 +4877,117 @@
               <a:rPr lang="ko-KR" altLang="en-US" sz="1200" dirty="0"/>
               <a:t>설치 방법 확인 후 그대로 진행</a:t>
             </a:r>
-          </a:p>
-        </p:txBody>
-      </p:sp>
+            <a:endParaRPr lang="en-US" altLang="ko-KR" sz="1200" dirty="0"/>
+          </a:p>
+          <a:p>
+            <a:br>
+              <a:rPr lang="en-US" altLang="ko-KR" sz="1200" dirty="0"/>
+            </a:br>
+            <a:r>
+              <a:rPr lang="en-US" altLang="ko-KR" sz="1200" dirty="0"/>
+              <a:t>- git</a:t>
+            </a:r>
+            <a:r>
+              <a:rPr lang="ko-KR" altLang="en-US" sz="1200" dirty="0"/>
+              <a:t> </a:t>
+            </a:r>
+            <a:r>
+              <a:rPr lang="en-US" altLang="ko-KR" sz="1200" dirty="0"/>
+              <a:t>email</a:t>
+            </a:r>
+            <a:r>
+              <a:rPr lang="ko-KR" altLang="en-US" sz="1200" dirty="0"/>
+              <a:t> 및 </a:t>
+            </a:r>
+            <a:r>
+              <a:rPr lang="en-US" altLang="ko-KR" sz="1200" dirty="0"/>
+              <a:t>username </a:t>
+            </a:r>
+            <a:r>
+              <a:rPr lang="ko-KR" altLang="en-US" sz="1200" dirty="0"/>
+              <a:t>설정</a:t>
+            </a:r>
+            <a:br>
+              <a:rPr lang="en-US" altLang="ko-KR" sz="1200" dirty="0"/>
+            </a:br>
+            <a:r>
+              <a:rPr lang="en-US" altLang="ko-KR" sz="1200" dirty="0"/>
+              <a:t>git config --global user.name "khb"</a:t>
+            </a:r>
+          </a:p>
+          <a:p>
+            <a:r>
+              <a:rPr lang="en-US" altLang="ko-KR" sz="1200" dirty="0"/>
+              <a:t>git config --global </a:t>
+            </a:r>
+            <a:r>
+              <a:rPr lang="en-US" altLang="ko-KR" sz="1200" dirty="0" err="1"/>
+              <a:t>user.email</a:t>
+            </a:r>
+            <a:r>
+              <a:rPr lang="en-US" altLang="ko-KR" sz="1200" dirty="0"/>
+              <a:t> </a:t>
+            </a:r>
+            <a:r>
+              <a:rPr lang="en-US" altLang="ko-KR" sz="1200" dirty="0">
+                <a:hlinkClick r:id="rId3"/>
+              </a:rPr>
+              <a:t>khb3025@gmail.com</a:t>
+            </a:r>
+            <a:br>
+              <a:rPr lang="en-US" altLang="ko-KR" sz="1200" dirty="0"/>
+            </a:br>
+            <a:br>
+              <a:rPr lang="en-US" altLang="ko-KR" sz="1200" dirty="0"/>
+            </a:br>
+            <a:r>
+              <a:rPr lang="en-US" altLang="ko-KR" sz="1200" dirty="0"/>
+              <a:t>- git repository </a:t>
+            </a:r>
+            <a:r>
+              <a:rPr lang="ko-KR" altLang="en-US" sz="1200" dirty="0"/>
+              <a:t>생성 및 </a:t>
+            </a:r>
+            <a:r>
+              <a:rPr lang="en-US" altLang="ko-KR" sz="1200" dirty="0"/>
+              <a:t>first commit</a:t>
+            </a:r>
+          </a:p>
+          <a:p>
+            <a:endParaRPr lang="ko-KR" altLang="en-US" sz="1200" dirty="0"/>
+          </a:p>
+        </p:txBody>
+      </p:sp>
+      <p:pic>
+        <p:nvPicPr>
+          <p:cNvPr id="9" name="그림 8">
+            <a:extLst>
+              <a:ext uri="{FF2B5EF4-FFF2-40B4-BE49-F238E27FC236}">
+                <a16:creationId xmlns:a16="http://schemas.microsoft.com/office/drawing/2014/main" id="{C8B7685C-47ED-FEA4-7150-4F72B5986F7C}"/>
+              </a:ext>
+            </a:extLst>
+          </p:cNvPr>
+          <p:cNvPicPr>
+            <a:picLocks noChangeAspect="1"/>
+          </p:cNvPicPr>
+          <p:nvPr/>
+        </p:nvPicPr>
+        <p:blipFill>
+          <a:blip r:embed="rId4"/>
+          <a:stretch>
+            <a:fillRect/>
+          </a:stretch>
+        </p:blipFill>
+        <p:spPr>
+          <a:xfrm>
+            <a:off x="5823039" y="3649089"/>
+            <a:ext cx="5241201" cy="1810829"/>
+          </a:xfrm>
+          <a:prstGeom prst="rect">
+            <a:avLst/>
+          </a:prstGeom>
+        </p:spPr>
+      </p:pic>
     </p:spTree>
     <p:extLst>
       <p:ext uri="{BB962C8B-B14F-4D97-AF65-F5344CB8AC3E}">
